--- a/DR/защита.pptx
+++ b/DR/защита.pptx
@@ -5,7 +5,7 @@
     <p:sldMasterId id="2147483677" r:id="rId1"/>
   </p:sldMasterIdLst>
   <p:notesMasterIdLst>
-    <p:notesMasterId r:id="rId8"/>
+    <p:notesMasterId r:id="rId12"/>
   </p:notesMasterIdLst>
   <p:sldIdLst>
     <p:sldId id="256" r:id="rId2"/>
@@ -14,6 +14,10 @@
     <p:sldId id="259" r:id="rId5"/>
     <p:sldId id="260" r:id="rId6"/>
     <p:sldId id="261" r:id="rId7"/>
+    <p:sldId id="262" r:id="rId8"/>
+    <p:sldId id="263" r:id="rId9"/>
+    <p:sldId id="264" r:id="rId10"/>
+    <p:sldId id="265" r:id="rId11"/>
   </p:sldIdLst>
   <p:sldSz cx="12192000" cy="6858000"/>
   <p:notesSz cx="6858000" cy="9144000"/>
@@ -112,6 +116,11 @@
       </a:defRPr>
     </a:lvl9pPr>
   </p:defaultTextStyle>
+  <p:extLst>
+    <p:ext uri="{EFAFB233-063F-42B5-8137-9DF3F51BA10A}">
+      <p15:sldGuideLst xmlns:p15="http://schemas.microsoft.com/office/powerpoint/2012/main"/>
+    </p:ext>
+  </p:extLst>
 </p:presentation>
 </file>
 
@@ -197,7 +206,7 @@
           <a:p>
             <a:fld id="{07954605-55D4-4E23-90C8-AD482CC8543E}" type="datetimeFigureOut">
               <a:rPr lang="bg-BG" smtClean="0"/>
-              <a:t>28.4.2026 г.</a:t>
+              <a:t>29.4.2026 г.</a:t>
             </a:fld>
             <a:endParaRPr lang="bg-BG"/>
           </a:p>
@@ -576,6 +585,104 @@
 </p:notes>
 </file>
 
+<file path=ppt/notesSlides/notesSlide10.xml><?xml version="1.0" encoding="utf-8"?>
+<p:notes xmlns:a="http://schemas.openxmlformats.org/drawingml/2006/main" xmlns:r="http://schemas.openxmlformats.org/officeDocument/2006/relationships" xmlns:p="http://schemas.openxmlformats.org/presentationml/2006/main">
+  <p:cSld>
+    <p:spTree>
+      <p:nvGrpSpPr>
+        <p:cNvPr id="1" name=""/>
+        <p:cNvGrpSpPr/>
+        <p:nvPr/>
+      </p:nvGrpSpPr>
+      <p:grpSpPr>
+        <a:xfrm>
+          <a:off x="0" y="0"/>
+          <a:ext cx="0" cy="0"/>
+          <a:chOff x="0" y="0"/>
+          <a:chExt cx="0" cy="0"/>
+        </a:xfrm>
+      </p:grpSpPr>
+      <p:sp>
+        <p:nvSpPr>
+          <p:cNvPr id="2" name="Slide Image Placeholder 1"/>
+          <p:cNvSpPr>
+            <a:spLocks noGrp="1" noRot="1" noChangeAspect="1"/>
+          </p:cNvSpPr>
+          <p:nvPr>
+            <p:ph type="sldImg"/>
+          </p:nvPr>
+        </p:nvSpPr>
+        <p:spPr/>
+      </p:sp>
+      <p:sp>
+        <p:nvSpPr>
+          <p:cNvPr id="3" name="Notes Placeholder 2"/>
+          <p:cNvSpPr>
+            <a:spLocks noGrp="1"/>
+          </p:cNvSpPr>
+          <p:nvPr>
+            <p:ph type="body" idx="1"/>
+          </p:nvPr>
+        </p:nvSpPr>
+        <p:spPr/>
+        <p:txBody>
+          <a:bodyPr/>
+          <a:lstStyle/>
+          <a:p>
+            <a:r>
+              <a:rPr lang="bg-BG" dirty="0" smtClean="0"/>
+              <a:t>Благодаря</a:t>
+            </a:r>
+            <a:r>
+              <a:rPr lang="bg-BG" baseline="0" dirty="0" smtClean="0"/>
+              <a:t> Ви за отделеното внимание</a:t>
+            </a:r>
+          </a:p>
+          <a:p>
+            <a:r>
+              <a:rPr lang="bg-BG" baseline="0" dirty="0" smtClean="0"/>
+              <a:t>Готов съм за вашите въпроси</a:t>
+            </a:r>
+            <a:endParaRPr lang="bg-BG" dirty="0"/>
+          </a:p>
+        </p:txBody>
+      </p:sp>
+      <p:sp>
+        <p:nvSpPr>
+          <p:cNvPr id="4" name="Slide Number Placeholder 3"/>
+          <p:cNvSpPr>
+            <a:spLocks noGrp="1"/>
+          </p:cNvSpPr>
+          <p:nvPr>
+            <p:ph type="sldNum" sz="quarter" idx="10"/>
+          </p:nvPr>
+        </p:nvSpPr>
+        <p:spPr/>
+        <p:txBody>
+          <a:bodyPr/>
+          <a:lstStyle/>
+          <a:p>
+            <a:fld id="{DA187EAD-EC98-4B70-B0B6-C5CFC1425A7F}" type="slidenum">
+              <a:rPr lang="bg-BG" smtClean="0"/>
+              <a:t>10</a:t>
+            </a:fld>
+            <a:endParaRPr lang="bg-BG"/>
+          </a:p>
+        </p:txBody>
+      </p:sp>
+    </p:spTree>
+    <p:extLst>
+      <p:ext uri="{BB962C8B-B14F-4D97-AF65-F5344CB8AC3E}">
+        <p14:creationId xmlns:p14="http://schemas.microsoft.com/office/powerpoint/2010/main" val="1058153994"/>
+      </p:ext>
+    </p:extLst>
+  </p:cSld>
+  <p:clrMapOvr>
+    <a:masterClrMapping/>
+  </p:clrMapOvr>
+</p:notes>
+</file>
+
 <file path=ppt/notesSlides/notesSlide2.xml><?xml version="1.0" encoding="utf-8"?>
 <p:notes xmlns:a="http://schemas.openxmlformats.org/drawingml/2006/main" xmlns:r="http://schemas.openxmlformats.org/officeDocument/2006/relationships" xmlns:p="http://schemas.openxmlformats.org/presentationml/2006/main">
   <p:cSld>
@@ -959,10 +1066,8 @@
                 <a:ea typeface="+mn-ea"/>
                 <a:cs typeface="+mn-cs"/>
               </a:rPr>
-              <a:t>Работата на приложението започва от потребителя, който въвежда текст. Този текст се изпраща към сървъра, където преминава през няколко етапа.</a:t>
-            </a:r>
-          </a:p>
-          <a:p>
+              <a:t>Работата на приложението започва от потребителя, който въвежда текст. Този текст се изпраща към сървъра, където преминава през няколко етапа</a:t>
+            </a:r>
             <a:r>
               <a:rPr lang="bg-BG" sz="1200" kern="1200" dirty="0" smtClean="0">
                 <a:solidFill>
@@ -973,8 +1078,104 @@
                 <a:ea typeface="+mn-ea"/>
                 <a:cs typeface="+mn-cs"/>
               </a:rPr>
-              <a:t>Първо се извършва предварителна обработка – текстът се почиства и подготвя. След това се разделя на отделни елементи чрез токенизация.</a:t>
-            </a:r>
+              <a:t>.</a:t>
+            </a:r>
+          </a:p>
+          <a:p>
+            <a:endParaRPr lang="bg-BG" sz="1200" kern="1200" dirty="0" smtClean="0">
+              <a:solidFill>
+                <a:schemeClr val="tx1"/>
+              </a:solidFill>
+              <a:effectLst/>
+              <a:latin typeface="+mn-lt"/>
+              <a:ea typeface="+mn-ea"/>
+              <a:cs typeface="+mn-cs"/>
+            </a:endParaRPr>
+          </a:p>
+          <a:p>
+            <a:r>
+              <a:rPr lang="bg-BG" sz="1200" kern="1200" dirty="0" smtClean="0">
+                <a:solidFill>
+                  <a:schemeClr val="tx1"/>
+                </a:solidFill>
+                <a:effectLst/>
+                <a:latin typeface="+mn-lt"/>
+                <a:ea typeface="+mn-ea"/>
+                <a:cs typeface="+mn-cs"/>
+              </a:rPr>
+              <a:t>Първо се извършва предварителна обработка – текстът се почиства и подготвя. След това </a:t>
+            </a:r>
+            <a:r>
+              <a:rPr lang="bg-BG" sz="1200" kern="1200" dirty="0" smtClean="0">
+                <a:solidFill>
+                  <a:schemeClr val="tx1"/>
+                </a:solidFill>
+                <a:effectLst/>
+                <a:latin typeface="+mn-lt"/>
+                <a:ea typeface="+mn-ea"/>
+                <a:cs typeface="+mn-cs"/>
+              </a:rPr>
+              <a:t>преминава през токенизация,</a:t>
+            </a:r>
+            <a:r>
+              <a:rPr lang="bg-BG" sz="1200" kern="1200" baseline="0" dirty="0" smtClean="0">
+                <a:solidFill>
+                  <a:schemeClr val="tx1"/>
+                </a:solidFill>
+                <a:effectLst/>
+                <a:latin typeface="+mn-lt"/>
+                <a:ea typeface="+mn-ea"/>
+                <a:cs typeface="+mn-cs"/>
+              </a:rPr>
+              <a:t> която представлява</a:t>
+            </a:r>
+            <a:r>
+              <a:rPr lang="bg-BG" sz="1200" kern="1200" dirty="0" smtClean="0">
+                <a:solidFill>
+                  <a:schemeClr val="tx1"/>
+                </a:solidFill>
+                <a:effectLst/>
+                <a:latin typeface="+mn-lt"/>
+                <a:ea typeface="+mn-ea"/>
+                <a:cs typeface="+mn-cs"/>
+              </a:rPr>
+              <a:t> разделяне на текста </a:t>
+            </a:r>
+            <a:r>
+              <a:rPr lang="bg-BG" sz="1200" kern="1200" dirty="0" smtClean="0">
+                <a:solidFill>
+                  <a:schemeClr val="tx1"/>
+                </a:solidFill>
+                <a:effectLst/>
+                <a:latin typeface="+mn-lt"/>
+                <a:ea typeface="+mn-ea"/>
+                <a:cs typeface="+mn-cs"/>
+              </a:rPr>
+              <a:t>на отделни </a:t>
+            </a:r>
+            <a:r>
+              <a:rPr lang="bg-BG" sz="1200" kern="1200" dirty="0" smtClean="0">
+                <a:solidFill>
+                  <a:schemeClr val="tx1"/>
+                </a:solidFill>
+                <a:effectLst/>
+                <a:latin typeface="+mn-lt"/>
+                <a:ea typeface="+mn-ea"/>
+                <a:cs typeface="+mn-cs"/>
+              </a:rPr>
+              <a:t>елементи.</a:t>
+            </a:r>
+          </a:p>
+          <a:p>
+            <a:endParaRPr lang="bg-BG" sz="1200" kern="1200" dirty="0" smtClean="0">
+              <a:solidFill>
+                <a:schemeClr val="tx1"/>
+              </a:solidFill>
+              <a:effectLst/>
+              <a:latin typeface="+mn-lt"/>
+              <a:ea typeface="+mn-ea"/>
+              <a:cs typeface="+mn-cs"/>
+            </a:endParaRPr>
           </a:p>
           <a:p>
             <a:r>
@@ -1019,6 +1220,502 @@
     <p:extLst>
       <p:ext uri="{BB962C8B-B14F-4D97-AF65-F5344CB8AC3E}">
         <p14:creationId xmlns:p14="http://schemas.microsoft.com/office/powerpoint/2010/main" val="552319260"/>
+      </p:ext>
+    </p:extLst>
+  </p:cSld>
+  <p:clrMapOvr>
+    <a:masterClrMapping/>
+  </p:clrMapOvr>
+</p:notes>
+</file>
+
+<file path=ppt/notesSlides/notesSlide6.xml><?xml version="1.0" encoding="utf-8"?>
+<p:notes xmlns:a="http://schemas.openxmlformats.org/drawingml/2006/main" xmlns:r="http://schemas.openxmlformats.org/officeDocument/2006/relationships" xmlns:p="http://schemas.openxmlformats.org/presentationml/2006/main">
+  <p:cSld>
+    <p:spTree>
+      <p:nvGrpSpPr>
+        <p:cNvPr id="1" name=""/>
+        <p:cNvGrpSpPr/>
+        <p:nvPr/>
+      </p:nvGrpSpPr>
+      <p:grpSpPr>
+        <a:xfrm>
+          <a:off x="0" y="0"/>
+          <a:ext cx="0" cy="0"/>
+          <a:chOff x="0" y="0"/>
+          <a:chExt cx="0" cy="0"/>
+        </a:xfrm>
+      </p:grpSpPr>
+      <p:sp>
+        <p:nvSpPr>
+          <p:cNvPr id="2" name="Slide Image Placeholder 1"/>
+          <p:cNvSpPr>
+            <a:spLocks noGrp="1" noRot="1" noChangeAspect="1"/>
+          </p:cNvSpPr>
+          <p:nvPr>
+            <p:ph type="sldImg"/>
+          </p:nvPr>
+        </p:nvSpPr>
+        <p:spPr/>
+      </p:sp>
+      <p:sp>
+        <p:nvSpPr>
+          <p:cNvPr id="3" name="Notes Placeholder 2"/>
+          <p:cNvSpPr>
+            <a:spLocks noGrp="1"/>
+          </p:cNvSpPr>
+          <p:nvPr>
+            <p:ph type="body" idx="1"/>
+          </p:nvPr>
+        </p:nvSpPr>
+        <p:spPr/>
+        <p:txBody>
+          <a:bodyPr/>
+          <a:lstStyle/>
+          <a:p>
+            <a:r>
+              <a:rPr lang="bg-BG" sz="1200" kern="1200" dirty="0" smtClean="0">
+                <a:solidFill>
+                  <a:schemeClr val="tx1"/>
+                </a:solidFill>
+                <a:effectLst/>
+                <a:latin typeface="+mn-lt"/>
+                <a:ea typeface="+mn-ea"/>
+                <a:cs typeface="+mn-cs"/>
+              </a:rPr>
+              <a:t>Анализът на емоции е процес, при който се определя дали даден текст изразява положително, отрицателно или неутрално мнение.</a:t>
+            </a:r>
+          </a:p>
+          <a:p>
+            <a:r>
+              <a:rPr lang="bg-BG" sz="1200" kern="1200" dirty="0" smtClean="0">
+                <a:solidFill>
+                  <a:schemeClr val="tx1"/>
+                </a:solidFill>
+                <a:effectLst/>
+                <a:latin typeface="+mn-lt"/>
+                <a:ea typeface="+mn-ea"/>
+                <a:cs typeface="+mn-cs"/>
+              </a:rPr>
+              <a:t>Например, ако текстът е „Този продукт е много добър“, системата го разпознава като позитивен.</a:t>
+            </a:r>
+          </a:p>
+          <a:p>
+            <a:endParaRPr lang="bg-BG" dirty="0"/>
+          </a:p>
+        </p:txBody>
+      </p:sp>
+      <p:sp>
+        <p:nvSpPr>
+          <p:cNvPr id="4" name="Slide Number Placeholder 3"/>
+          <p:cNvSpPr>
+            <a:spLocks noGrp="1"/>
+          </p:cNvSpPr>
+          <p:nvPr>
+            <p:ph type="sldNum" sz="quarter" idx="10"/>
+          </p:nvPr>
+        </p:nvSpPr>
+        <p:spPr/>
+        <p:txBody>
+          <a:bodyPr/>
+          <a:lstStyle/>
+          <a:p>
+            <a:fld id="{DA187EAD-EC98-4B70-B0B6-C5CFC1425A7F}" type="slidenum">
+              <a:rPr lang="bg-BG" smtClean="0"/>
+              <a:t>6</a:t>
+            </a:fld>
+            <a:endParaRPr lang="bg-BG"/>
+          </a:p>
+        </p:txBody>
+      </p:sp>
+    </p:spTree>
+    <p:extLst>
+      <p:ext uri="{BB962C8B-B14F-4D97-AF65-F5344CB8AC3E}">
+        <p14:creationId xmlns:p14="http://schemas.microsoft.com/office/powerpoint/2010/main" val="3574898080"/>
+      </p:ext>
+    </p:extLst>
+  </p:cSld>
+  <p:clrMapOvr>
+    <a:masterClrMapping/>
+  </p:clrMapOvr>
+</p:notes>
+</file>
+
+<file path=ppt/notesSlides/notesSlide7.xml><?xml version="1.0" encoding="utf-8"?>
+<p:notes xmlns:a="http://schemas.openxmlformats.org/drawingml/2006/main" xmlns:r="http://schemas.openxmlformats.org/officeDocument/2006/relationships" xmlns:p="http://schemas.openxmlformats.org/presentationml/2006/main">
+  <p:cSld>
+    <p:spTree>
+      <p:nvGrpSpPr>
+        <p:cNvPr id="1" name=""/>
+        <p:cNvGrpSpPr/>
+        <p:nvPr/>
+      </p:nvGrpSpPr>
+      <p:grpSpPr>
+        <a:xfrm>
+          <a:off x="0" y="0"/>
+          <a:ext cx="0" cy="0"/>
+          <a:chOff x="0" y="0"/>
+          <a:chExt cx="0" cy="0"/>
+        </a:xfrm>
+      </p:grpSpPr>
+      <p:sp>
+        <p:nvSpPr>
+          <p:cNvPr id="2" name="Slide Image Placeholder 1"/>
+          <p:cNvSpPr>
+            <a:spLocks noGrp="1" noRot="1" noChangeAspect="1"/>
+          </p:cNvSpPr>
+          <p:nvPr>
+            <p:ph type="sldImg"/>
+          </p:nvPr>
+        </p:nvSpPr>
+        <p:spPr/>
+      </p:sp>
+      <p:sp>
+        <p:nvSpPr>
+          <p:cNvPr id="3" name="Notes Placeholder 2"/>
+          <p:cNvSpPr>
+            <a:spLocks noGrp="1"/>
+          </p:cNvSpPr>
+          <p:nvPr>
+            <p:ph type="body" idx="1"/>
+          </p:nvPr>
+        </p:nvSpPr>
+        <p:spPr/>
+        <p:txBody>
+          <a:bodyPr/>
+          <a:lstStyle/>
+          <a:p>
+            <a:r>
+              <a:rPr lang="bg-BG" sz="1200" kern="1200" dirty="0" smtClean="0">
+                <a:solidFill>
+                  <a:schemeClr val="tx1"/>
+                </a:solidFill>
+                <a:effectLst/>
+                <a:latin typeface="+mn-lt"/>
+                <a:ea typeface="+mn-ea"/>
+                <a:cs typeface="+mn-cs"/>
+              </a:rPr>
+              <a:t>За реализиране на проекта използвах Python и Django за сървърната част на приложението.</a:t>
+            </a:r>
+          </a:p>
+          <a:p>
+            <a:r>
+              <a:rPr lang="bg-BG" sz="1200" kern="1200" dirty="0" smtClean="0">
+                <a:solidFill>
+                  <a:schemeClr val="tx1"/>
+                </a:solidFill>
+                <a:effectLst/>
+                <a:latin typeface="+mn-lt"/>
+                <a:ea typeface="+mn-ea"/>
+                <a:cs typeface="+mn-cs"/>
+              </a:rPr>
+              <a:t>За клиентската част използвах HTML, CSS и JavaScript, а комуникацията между тях се осъществява чрез REST API.</a:t>
+            </a:r>
+          </a:p>
+          <a:p>
+            <a:r>
+              <a:rPr lang="bg-BG" sz="1200" kern="1200" dirty="0" smtClean="0">
+                <a:solidFill>
+                  <a:schemeClr val="tx1"/>
+                </a:solidFill>
+                <a:effectLst/>
+                <a:latin typeface="+mn-lt"/>
+                <a:ea typeface="+mn-ea"/>
+                <a:cs typeface="+mn-cs"/>
+              </a:rPr>
+              <a:t>Тези технологии позволяват създаването на модерно и функционално уеб приложение.</a:t>
+            </a:r>
+          </a:p>
+          <a:p>
+            <a:endParaRPr lang="bg-BG" dirty="0"/>
+          </a:p>
+        </p:txBody>
+      </p:sp>
+      <p:sp>
+        <p:nvSpPr>
+          <p:cNvPr id="4" name="Slide Number Placeholder 3"/>
+          <p:cNvSpPr>
+            <a:spLocks noGrp="1"/>
+          </p:cNvSpPr>
+          <p:nvPr>
+            <p:ph type="sldNum" sz="quarter" idx="10"/>
+          </p:nvPr>
+        </p:nvSpPr>
+        <p:spPr/>
+        <p:txBody>
+          <a:bodyPr/>
+          <a:lstStyle/>
+          <a:p>
+            <a:fld id="{DA187EAD-EC98-4B70-B0B6-C5CFC1425A7F}" type="slidenum">
+              <a:rPr lang="bg-BG" smtClean="0"/>
+              <a:t>7</a:t>
+            </a:fld>
+            <a:endParaRPr lang="bg-BG"/>
+          </a:p>
+        </p:txBody>
+      </p:sp>
+    </p:spTree>
+    <p:extLst>
+      <p:ext uri="{BB962C8B-B14F-4D97-AF65-F5344CB8AC3E}">
+        <p14:creationId xmlns:p14="http://schemas.microsoft.com/office/powerpoint/2010/main" val="1151011342"/>
+      </p:ext>
+    </p:extLst>
+  </p:cSld>
+  <p:clrMapOvr>
+    <a:masterClrMapping/>
+  </p:clrMapOvr>
+</p:notes>
+</file>
+
+<file path=ppt/notesSlides/notesSlide8.xml><?xml version="1.0" encoding="utf-8"?>
+<p:notes xmlns:a="http://schemas.openxmlformats.org/drawingml/2006/main" xmlns:r="http://schemas.openxmlformats.org/officeDocument/2006/relationships" xmlns:p="http://schemas.openxmlformats.org/presentationml/2006/main">
+  <p:cSld>
+    <p:spTree>
+      <p:nvGrpSpPr>
+        <p:cNvPr id="1" name=""/>
+        <p:cNvGrpSpPr/>
+        <p:nvPr/>
+      </p:nvGrpSpPr>
+      <p:grpSpPr>
+        <a:xfrm>
+          <a:off x="0" y="0"/>
+          <a:ext cx="0" cy="0"/>
+          <a:chOff x="0" y="0"/>
+          <a:chExt cx="0" cy="0"/>
+        </a:xfrm>
+      </p:grpSpPr>
+      <p:sp>
+        <p:nvSpPr>
+          <p:cNvPr id="2" name="Slide Image Placeholder 1"/>
+          <p:cNvSpPr>
+            <a:spLocks noGrp="1" noRot="1" noChangeAspect="1"/>
+          </p:cNvSpPr>
+          <p:nvPr>
+            <p:ph type="sldImg"/>
+          </p:nvPr>
+        </p:nvSpPr>
+        <p:spPr/>
+      </p:sp>
+      <p:sp>
+        <p:nvSpPr>
+          <p:cNvPr id="3" name="Notes Placeholder 2"/>
+          <p:cNvSpPr>
+            <a:spLocks noGrp="1"/>
+          </p:cNvSpPr>
+          <p:nvPr>
+            <p:ph type="body" idx="1"/>
+          </p:nvPr>
+        </p:nvSpPr>
+        <p:spPr/>
+        <p:txBody>
+          <a:bodyPr/>
+          <a:lstStyle/>
+          <a:p>
+            <a:r>
+              <a:rPr lang="bg-BG" sz="1200" kern="1200" dirty="0" smtClean="0">
+                <a:solidFill>
+                  <a:schemeClr val="tx1"/>
+                </a:solidFill>
+                <a:effectLst/>
+                <a:latin typeface="+mn-lt"/>
+                <a:ea typeface="+mn-ea"/>
+                <a:cs typeface="+mn-cs"/>
+              </a:rPr>
+              <a:t>Приложението беше тествано с различни текстове с цел да се провери неговата точност.</a:t>
+            </a:r>
+          </a:p>
+          <a:p>
+            <a:r>
+              <a:rPr lang="bg-BG" sz="1200" kern="1200" dirty="0" smtClean="0">
+                <a:solidFill>
+                  <a:schemeClr val="tx1"/>
+                </a:solidFill>
+                <a:effectLst/>
+                <a:latin typeface="+mn-lt"/>
+                <a:ea typeface="+mn-ea"/>
+                <a:cs typeface="+mn-cs"/>
+              </a:rPr>
+              <a:t>В повечето случаи системата успява правилно да разпознае емоционалната насоченост на текста, което показва, че избраният подход е ефективен.</a:t>
+            </a:r>
+          </a:p>
+          <a:p>
+            <a:endParaRPr lang="bg-BG" sz="1200" kern="1200" dirty="0" smtClean="0">
+              <a:solidFill>
+                <a:schemeClr val="tx1"/>
+              </a:solidFill>
+              <a:effectLst/>
+              <a:latin typeface="+mn-lt"/>
+              <a:ea typeface="+mn-ea"/>
+              <a:cs typeface="+mn-cs"/>
+            </a:endParaRPr>
+          </a:p>
+          <a:p>
+            <a:pPr marL="0" marR="0" indent="0" algn="l" defTabSz="914400" rtl="0" eaLnBrk="1" fontAlgn="auto" latinLnBrk="0" hangingPunct="1">
+              <a:lnSpc>
+                <a:spcPct val="100000"/>
+              </a:lnSpc>
+              <a:spcBef>
+                <a:spcPts val="0"/>
+              </a:spcBef>
+              <a:spcAft>
+                <a:spcPts val="0"/>
+              </a:spcAft>
+              <a:buClrTx/>
+              <a:buSzTx/>
+              <a:buFontTx/>
+              <a:buNone/>
+              <a:tabLst/>
+              <a:defRPr/>
+            </a:pPr>
+            <a:r>
+              <a:rPr lang="bg-BG" sz="1200" kern="1200" dirty="0" smtClean="0">
+                <a:solidFill>
+                  <a:schemeClr val="tx1"/>
+                </a:solidFill>
+                <a:effectLst/>
+                <a:latin typeface="+mn-lt"/>
+                <a:ea typeface="+mn-ea"/>
+                <a:cs typeface="+mn-cs"/>
+              </a:rPr>
+              <a:t>Въпреки това, системата има някои ограничения. Тя трудно разпознава ирония и сарказъм и понякога се затруднява при по-сложни изречения.</a:t>
+            </a:r>
+          </a:p>
+        </p:txBody>
+      </p:sp>
+      <p:sp>
+        <p:nvSpPr>
+          <p:cNvPr id="4" name="Slide Number Placeholder 3"/>
+          <p:cNvSpPr>
+            <a:spLocks noGrp="1"/>
+          </p:cNvSpPr>
+          <p:nvPr>
+            <p:ph type="sldNum" sz="quarter" idx="10"/>
+          </p:nvPr>
+        </p:nvSpPr>
+        <p:spPr/>
+        <p:txBody>
+          <a:bodyPr/>
+          <a:lstStyle/>
+          <a:p>
+            <a:fld id="{DA187EAD-EC98-4B70-B0B6-C5CFC1425A7F}" type="slidenum">
+              <a:rPr lang="bg-BG" smtClean="0"/>
+              <a:t>8</a:t>
+            </a:fld>
+            <a:endParaRPr lang="bg-BG"/>
+          </a:p>
+        </p:txBody>
+      </p:sp>
+    </p:spTree>
+    <p:extLst>
+      <p:ext uri="{BB962C8B-B14F-4D97-AF65-F5344CB8AC3E}">
+        <p14:creationId xmlns:p14="http://schemas.microsoft.com/office/powerpoint/2010/main" val="2484388198"/>
+      </p:ext>
+    </p:extLst>
+  </p:cSld>
+  <p:clrMapOvr>
+    <a:masterClrMapping/>
+  </p:clrMapOvr>
+</p:notes>
+</file>
+
+<file path=ppt/notesSlides/notesSlide9.xml><?xml version="1.0" encoding="utf-8"?>
+<p:notes xmlns:a="http://schemas.openxmlformats.org/drawingml/2006/main" xmlns:r="http://schemas.openxmlformats.org/officeDocument/2006/relationships" xmlns:p="http://schemas.openxmlformats.org/presentationml/2006/main">
+  <p:cSld>
+    <p:spTree>
+      <p:nvGrpSpPr>
+        <p:cNvPr id="1" name=""/>
+        <p:cNvGrpSpPr/>
+        <p:nvPr/>
+      </p:nvGrpSpPr>
+      <p:grpSpPr>
+        <a:xfrm>
+          <a:off x="0" y="0"/>
+          <a:ext cx="0" cy="0"/>
+          <a:chOff x="0" y="0"/>
+          <a:chExt cx="0" cy="0"/>
+        </a:xfrm>
+      </p:grpSpPr>
+      <p:sp>
+        <p:nvSpPr>
+          <p:cNvPr id="2" name="Slide Image Placeholder 1"/>
+          <p:cNvSpPr>
+            <a:spLocks noGrp="1" noRot="1" noChangeAspect="1"/>
+          </p:cNvSpPr>
+          <p:nvPr>
+            <p:ph type="sldImg"/>
+          </p:nvPr>
+        </p:nvSpPr>
+        <p:spPr/>
+      </p:sp>
+      <p:sp>
+        <p:nvSpPr>
+          <p:cNvPr id="3" name="Notes Placeholder 2"/>
+          <p:cNvSpPr>
+            <a:spLocks noGrp="1"/>
+          </p:cNvSpPr>
+          <p:nvPr>
+            <p:ph type="body" idx="1"/>
+          </p:nvPr>
+        </p:nvSpPr>
+        <p:spPr/>
+        <p:txBody>
+          <a:bodyPr/>
+          <a:lstStyle/>
+          <a:p>
+            <a:pPr marL="0" marR="0" indent="0" algn="l" defTabSz="914400" rtl="0" eaLnBrk="1" fontAlgn="auto" latinLnBrk="0" hangingPunct="1">
+              <a:lnSpc>
+                <a:spcPct val="100000"/>
+              </a:lnSpc>
+              <a:spcBef>
+                <a:spcPts val="0"/>
+              </a:spcBef>
+              <a:spcAft>
+                <a:spcPts val="0"/>
+              </a:spcAft>
+              <a:buClrTx/>
+              <a:buSzTx/>
+              <a:buFontTx/>
+              <a:buNone/>
+              <a:tabLst/>
+              <a:defRPr/>
+            </a:pPr>
+            <a:r>
+              <a:rPr lang="ru-RU" dirty="0" smtClean="0"/>
+              <a:t>Анализът на емоции се използва в онлайн магазини и социални мрежи, за да се разбере какво мислят хората за даден продукт или услуга. Това помага на компаниите да подобряват качеството си и да вземат по-добри решения на база реална обратна връзка.</a:t>
+            </a:r>
+          </a:p>
+          <a:p>
+            <a:endParaRPr lang="bg-BG" dirty="0"/>
+          </a:p>
+        </p:txBody>
+      </p:sp>
+      <p:sp>
+        <p:nvSpPr>
+          <p:cNvPr id="4" name="Slide Number Placeholder 3"/>
+          <p:cNvSpPr>
+            <a:spLocks noGrp="1"/>
+          </p:cNvSpPr>
+          <p:nvPr>
+            <p:ph type="sldNum" sz="quarter" idx="10"/>
+          </p:nvPr>
+        </p:nvSpPr>
+        <p:spPr/>
+        <p:txBody>
+          <a:bodyPr/>
+          <a:lstStyle/>
+          <a:p>
+            <a:fld id="{DA187EAD-EC98-4B70-B0B6-C5CFC1425A7F}" type="slidenum">
+              <a:rPr lang="bg-BG" smtClean="0"/>
+              <a:t>9</a:t>
+            </a:fld>
+            <a:endParaRPr lang="bg-BG"/>
+          </a:p>
+        </p:txBody>
+      </p:sp>
+    </p:spTree>
+    <p:extLst>
+      <p:ext uri="{BB962C8B-B14F-4D97-AF65-F5344CB8AC3E}">
+        <p14:creationId xmlns:p14="http://schemas.microsoft.com/office/powerpoint/2010/main" val="2159423961"/>
       </p:ext>
     </p:extLst>
   </p:cSld>
@@ -1254,7 +1951,7 @@
           <a:p>
             <a:fld id="{6D2D7101-39F5-43AF-A214-156FBC31505C}" type="datetimeFigureOut">
               <a:rPr lang="bg-BG" smtClean="0"/>
-              <a:t>28.4.2026 г.</a:t>
+              <a:t>29.4.2026 г.</a:t>
             </a:fld>
             <a:endParaRPr lang="bg-BG"/>
           </a:p>
@@ -1462,7 +2159,7 @@
           <a:p>
             <a:fld id="{6D2D7101-39F5-43AF-A214-156FBC31505C}" type="datetimeFigureOut">
               <a:rPr lang="bg-BG" smtClean="0"/>
-              <a:t>28.4.2026 г.</a:t>
+              <a:t>29.4.2026 г.</a:t>
             </a:fld>
             <a:endParaRPr lang="bg-BG"/>
           </a:p>
@@ -1718,7 +2415,7 @@
           <a:p>
             <a:fld id="{6D2D7101-39F5-43AF-A214-156FBC31505C}" type="datetimeFigureOut">
               <a:rPr lang="bg-BG" smtClean="0"/>
-              <a:t>28.4.2026 г.</a:t>
+              <a:t>29.4.2026 г.</a:t>
             </a:fld>
             <a:endParaRPr lang="bg-BG"/>
           </a:p>
@@ -1892,7 +2589,7 @@
           <a:p>
             <a:fld id="{6D2D7101-39F5-43AF-A214-156FBC31505C}" type="datetimeFigureOut">
               <a:rPr lang="bg-BG" smtClean="0"/>
-              <a:t>28.4.2026 г.</a:t>
+              <a:t>29.4.2026 г.</a:t>
             </a:fld>
             <a:endParaRPr lang="bg-BG"/>
           </a:p>
@@ -2235,7 +2932,7 @@
           <a:p>
             <a:fld id="{6D2D7101-39F5-43AF-A214-156FBC31505C}" type="datetimeFigureOut">
               <a:rPr lang="bg-BG" smtClean="0"/>
-              <a:t>28.4.2026 г.</a:t>
+              <a:t>29.4.2026 г.</a:t>
             </a:fld>
             <a:endParaRPr lang="bg-BG"/>
           </a:p>
@@ -2510,7 +3207,7 @@
           <a:p>
             <a:fld id="{6D2D7101-39F5-43AF-A214-156FBC31505C}" type="datetimeFigureOut">
               <a:rPr lang="bg-BG" smtClean="0"/>
-              <a:t>28.4.2026 г.</a:t>
+              <a:t>29.4.2026 г.</a:t>
             </a:fld>
             <a:endParaRPr lang="bg-BG"/>
           </a:p>
@@ -2889,7 +3586,7 @@
           <a:p>
             <a:fld id="{6D2D7101-39F5-43AF-A214-156FBC31505C}" type="datetimeFigureOut">
               <a:rPr lang="bg-BG" smtClean="0"/>
-              <a:t>28.4.2026 г.</a:t>
+              <a:t>29.4.2026 г.</a:t>
             </a:fld>
             <a:endParaRPr lang="bg-BG"/>
           </a:p>
@@ -3007,7 +3704,7 @@
           <a:p>
             <a:fld id="{6D2D7101-39F5-43AF-A214-156FBC31505C}" type="datetimeFigureOut">
               <a:rPr lang="bg-BG" smtClean="0"/>
-              <a:t>28.4.2026 г.</a:t>
+              <a:t>29.4.2026 г.</a:t>
             </a:fld>
             <a:endParaRPr lang="bg-BG"/>
           </a:p>
@@ -3178,7 +3875,7 @@
           <a:p>
             <a:fld id="{6D2D7101-39F5-43AF-A214-156FBC31505C}" type="datetimeFigureOut">
               <a:rPr lang="bg-BG" smtClean="0"/>
-              <a:t>28.4.2026 г.</a:t>
+              <a:t>29.4.2026 г.</a:t>
             </a:fld>
             <a:endParaRPr lang="bg-BG"/>
           </a:p>
@@ -3532,7 +4229,7 @@
           <a:p>
             <a:fld id="{6D2D7101-39F5-43AF-A214-156FBC31505C}" type="datetimeFigureOut">
               <a:rPr lang="bg-BG" smtClean="0"/>
-              <a:t>28.4.2026 г.</a:t>
+              <a:t>29.4.2026 г.</a:t>
             </a:fld>
             <a:endParaRPr lang="bg-BG"/>
           </a:p>
@@ -3914,7 +4611,7 @@
           <a:p>
             <a:fld id="{6D2D7101-39F5-43AF-A214-156FBC31505C}" type="datetimeFigureOut">
               <a:rPr lang="bg-BG" smtClean="0"/>
-              <a:t>28.4.2026 г.</a:t>
+              <a:t>29.4.2026 г.</a:t>
             </a:fld>
             <a:endParaRPr lang="bg-BG"/>
           </a:p>
@@ -4201,7 +4898,7 @@
           <a:p>
             <a:fld id="{6D2D7101-39F5-43AF-A214-156FBC31505C}" type="datetimeFigureOut">
               <a:rPr lang="bg-BG" smtClean="0"/>
-              <a:t>28.4.2026 г.</a:t>
+              <a:t>29.4.2026 г.</a:t>
             </a:fld>
             <a:endParaRPr lang="bg-BG"/>
           </a:p>
@@ -4737,7 +5434,7 @@
         </p:nvSpPr>
         <p:spPr>
           <a:xfrm>
-            <a:off x="2053625" y="-667176"/>
+            <a:off x="1778418" y="-817661"/>
             <a:ext cx="10058400" cy="3566160"/>
           </a:xfrm>
         </p:spPr>
@@ -4747,6 +5444,7 @@
           </a:bodyPr>
           <a:lstStyle/>
           <a:p>
+            <a:pPr algn="ctr"/>
             <a:r>
               <a:rPr lang="ru-RU" sz="3600" dirty="0"/>
               <a:t>Държавен изпит за придобиване на трета степен на професионална квалификация – част по теория на професиятапо професия код 481030 „Приложен програмист”специалност код 4810301 „Приложно програмиране"</a:t>
@@ -4859,6 +5557,119 @@
 </p:sld>
 </file>
 
+<file path=ppt/slides/slide10.xml><?xml version="1.0" encoding="utf-8"?>
+<p:sld xmlns:a="http://schemas.openxmlformats.org/drawingml/2006/main" xmlns:r="http://schemas.openxmlformats.org/officeDocument/2006/relationships" xmlns:p="http://schemas.openxmlformats.org/presentationml/2006/main">
+  <p:cSld>
+    <p:spTree>
+      <p:nvGrpSpPr>
+        <p:cNvPr id="1" name=""/>
+        <p:cNvGrpSpPr/>
+        <p:nvPr/>
+      </p:nvGrpSpPr>
+      <p:grpSpPr>
+        <a:xfrm>
+          <a:off x="0" y="0"/>
+          <a:ext cx="0" cy="0"/>
+          <a:chOff x="0" y="0"/>
+          <a:chExt cx="0" cy="0"/>
+        </a:xfrm>
+      </p:grpSpPr>
+      <p:sp>
+        <p:nvSpPr>
+          <p:cNvPr id="2" name="Title 1"/>
+          <p:cNvSpPr>
+            <a:spLocks noGrp="1"/>
+          </p:cNvSpPr>
+          <p:nvPr>
+            <p:ph type="title"/>
+          </p:nvPr>
+        </p:nvSpPr>
+        <p:spPr>
+          <a:xfrm>
+            <a:off x="2704139" y="2175028"/>
+            <a:ext cx="6892623" cy="1450757"/>
+          </a:xfrm>
+        </p:spPr>
+        <p:txBody>
+          <a:bodyPr/>
+          <a:lstStyle/>
+          <a:p>
+            <a:r>
+              <a:rPr lang="bg-BG" dirty="0" smtClean="0"/>
+              <a:t>Благодаря за вниманието!</a:t>
+            </a:r>
+            <a:endParaRPr lang="bg-BG" dirty="0"/>
+          </a:p>
+        </p:txBody>
+      </p:sp>
+      <p:sp>
+        <p:nvSpPr>
+          <p:cNvPr id="4" name="Rectangle 3"/>
+          <p:cNvSpPr/>
+          <p:nvPr/>
+        </p:nvSpPr>
+        <p:spPr>
+          <a:xfrm>
+            <a:off x="1180730" y="1562470"/>
+            <a:ext cx="10227076" cy="363985"/>
+          </a:xfrm>
+          <a:prstGeom prst="rect">
+            <a:avLst/>
+          </a:prstGeom>
+          <a:solidFill>
+            <a:schemeClr val="bg1"/>
+          </a:solidFill>
+          <a:ln>
+            <a:solidFill>
+              <a:schemeClr val="bg1"/>
+            </a:solidFill>
+          </a:ln>
+        </p:spPr>
+        <p:style>
+          <a:lnRef idx="2">
+            <a:schemeClr val="accent1">
+              <a:shade val="50000"/>
+            </a:schemeClr>
+          </a:lnRef>
+          <a:fillRef idx="1">
+            <a:schemeClr val="accent1"/>
+          </a:fillRef>
+          <a:effectRef idx="0">
+            <a:schemeClr val="accent1"/>
+          </a:effectRef>
+          <a:fontRef idx="minor">
+            <a:schemeClr val="lt1"/>
+          </a:fontRef>
+        </p:style>
+        <p:txBody>
+          <a:bodyPr rtlCol="0" anchor="ctr"/>
+          <a:lstStyle/>
+          <a:p>
+            <a:pPr algn="ctr"/>
+            <a:endParaRPr lang="bg-BG"/>
+          </a:p>
+        </p:txBody>
+      </p:sp>
+    </p:spTree>
+    <p:extLst>
+      <p:ext uri="{BB962C8B-B14F-4D97-AF65-F5344CB8AC3E}">
+        <p14:creationId xmlns:p14="http://schemas.microsoft.com/office/powerpoint/2010/main" val="3432860573"/>
+      </p:ext>
+    </p:extLst>
+  </p:cSld>
+  <p:clrMapOvr>
+    <a:masterClrMapping/>
+  </p:clrMapOvr>
+  <p:timing>
+    <p:tnLst>
+      <p:par>
+        <p:cTn id="1" dur="indefinite" restart="never" nodeType="tmRoot"/>
+      </p:par>
+    </p:tnLst>
+  </p:timing>
+</p:sld>
+</file>
+
 <file path=ppt/slides/slide2.xml><?xml version="1.0" encoding="utf-8"?>
 <p:sld xmlns:a="http://schemas.openxmlformats.org/drawingml/2006/main" xmlns:r="http://schemas.openxmlformats.org/officeDocument/2006/relationships" xmlns:p="http://schemas.openxmlformats.org/presentationml/2006/main">
   <p:cSld>
@@ -4892,7 +5703,7 @@
           <a:lstStyle/>
           <a:p>
             <a:r>
-              <a:rPr lang="bg-BG" b="1" dirty="0" smtClean="0"/>
+              <a:rPr lang="bg-BG" dirty="0" smtClean="0"/>
               <a:t>Проблемът</a:t>
             </a:r>
             <a:endParaRPr lang="bg-BG" dirty="0"/>
@@ -5471,7 +6282,7 @@
           <p:nvPr/>
         </p:nvPicPr>
         <p:blipFill>
-          <a:blip r:embed="rId2"/>
+          <a:blip r:embed="rId3"/>
           <a:stretch>
             <a:fillRect/>
           </a:stretch>
@@ -5601,6 +6412,524 @@
     <p:extLst>
       <p:ext uri="{BB962C8B-B14F-4D97-AF65-F5344CB8AC3E}">
         <p14:creationId xmlns:p14="http://schemas.microsoft.com/office/powerpoint/2010/main" val="795149441"/>
+      </p:ext>
+    </p:extLst>
+  </p:cSld>
+  <p:clrMapOvr>
+    <a:masterClrMapping/>
+  </p:clrMapOvr>
+  <p:timing>
+    <p:tnLst>
+      <p:par>
+        <p:cTn id="1" dur="indefinite" restart="never" nodeType="tmRoot"/>
+      </p:par>
+    </p:tnLst>
+  </p:timing>
+</p:sld>
+</file>
+
+<file path=ppt/slides/slide7.xml><?xml version="1.0" encoding="utf-8"?>
+<p:sld xmlns:a="http://schemas.openxmlformats.org/drawingml/2006/main" xmlns:r="http://schemas.openxmlformats.org/officeDocument/2006/relationships" xmlns:p="http://schemas.openxmlformats.org/presentationml/2006/main">
+  <p:cSld>
+    <p:spTree>
+      <p:nvGrpSpPr>
+        <p:cNvPr id="1" name=""/>
+        <p:cNvGrpSpPr/>
+        <p:nvPr/>
+      </p:nvGrpSpPr>
+      <p:grpSpPr>
+        <a:xfrm>
+          <a:off x="0" y="0"/>
+          <a:ext cx="0" cy="0"/>
+          <a:chOff x="0" y="0"/>
+          <a:chExt cx="0" cy="0"/>
+        </a:xfrm>
+      </p:grpSpPr>
+      <p:pic>
+        <p:nvPicPr>
+          <p:cNvPr id="1030" name="Picture 6" descr="Python logo - free Icon PNG, SVG"/>
+          <p:cNvPicPr>
+            <a:picLocks noChangeAspect="1" noChangeArrowheads="1"/>
+          </p:cNvPicPr>
+          <p:nvPr/>
+        </p:nvPicPr>
+        <p:blipFill>
+          <a:blip r:embed="rId3" cstate="print">
+            <a:extLst>
+              <a:ext uri="{28A0092B-C50C-407E-A947-70E740481C1C}">
+                <a14:useLocalDpi xmlns:a14="http://schemas.microsoft.com/office/drawing/2010/main" val="0"/>
+              </a:ext>
+            </a:extLst>
+          </a:blip>
+          <a:srcRect/>
+          <a:stretch>
+            <a:fillRect/>
+          </a:stretch>
+        </p:blipFill>
+        <p:spPr bwMode="auto">
+          <a:xfrm>
+            <a:off x="248216" y="4438177"/>
+            <a:ext cx="1698127" cy="1698128"/>
+          </a:xfrm>
+          <a:prstGeom prst="rect">
+            <a:avLst/>
+          </a:prstGeom>
+          <a:noFill/>
+          <a:extLst>
+            <a:ext uri="{909E8E84-426E-40DD-AFC4-6F175D3DCCD1}">
+              <a14:hiddenFill xmlns:a14="http://schemas.microsoft.com/office/drawing/2010/main">
+                <a:solidFill>
+                  <a:srgbClr val="FFFFFF"/>
+                </a:solidFill>
+              </a14:hiddenFill>
+            </a:ext>
+          </a:extLst>
+        </p:spPr>
+      </p:pic>
+      <p:sp>
+        <p:nvSpPr>
+          <p:cNvPr id="2" name="Title 1"/>
+          <p:cNvSpPr>
+            <a:spLocks noGrp="1"/>
+          </p:cNvSpPr>
+          <p:nvPr>
+            <p:ph type="title"/>
+          </p:nvPr>
+        </p:nvSpPr>
+        <p:spPr/>
+        <p:txBody>
+          <a:bodyPr/>
+          <a:lstStyle/>
+          <a:p>
+            <a:r>
+              <a:rPr lang="bg-BG" dirty="0" smtClean="0"/>
+              <a:t>Технологии</a:t>
+            </a:r>
+            <a:endParaRPr lang="bg-BG" dirty="0"/>
+          </a:p>
+        </p:txBody>
+      </p:sp>
+      <p:sp>
+        <p:nvSpPr>
+          <p:cNvPr id="4" name="Rectangle 3"/>
+          <p:cNvSpPr/>
+          <p:nvPr/>
+        </p:nvSpPr>
+        <p:spPr>
+          <a:xfrm>
+            <a:off x="1097280" y="2181004"/>
+            <a:ext cx="6096000" cy="2062103"/>
+          </a:xfrm>
+          <a:prstGeom prst="rect">
+            <a:avLst/>
+          </a:prstGeom>
+        </p:spPr>
+        <p:txBody>
+          <a:bodyPr>
+            <a:spAutoFit/>
+          </a:bodyPr>
+          <a:lstStyle/>
+          <a:p>
+            <a:r>
+              <a:rPr lang="en-US" sz="3200" b="1" dirty="0"/>
+              <a:t>Backend</a:t>
+            </a:r>
+          </a:p>
+          <a:p>
+            <a:pPr>
+              <a:buFont typeface="Arial" panose="020B0604020202020204" pitchFamily="34" charset="0"/>
+              <a:buChar char="•"/>
+            </a:pPr>
+            <a:r>
+              <a:rPr lang="en-US" sz="3200" dirty="0"/>
+              <a:t>Python</a:t>
+            </a:r>
+          </a:p>
+          <a:p>
+            <a:pPr>
+              <a:buFont typeface="Arial" panose="020B0604020202020204" pitchFamily="34" charset="0"/>
+              <a:buChar char="•"/>
+            </a:pPr>
+            <a:r>
+              <a:rPr lang="en-US" sz="3200" dirty="0"/>
+              <a:t>Django</a:t>
+            </a:r>
+          </a:p>
+          <a:p>
+            <a:pPr>
+              <a:buFont typeface="Arial" panose="020B0604020202020204" pitchFamily="34" charset="0"/>
+              <a:buChar char="•"/>
+            </a:pPr>
+            <a:r>
+              <a:rPr lang="bg-BG" sz="3200" dirty="0"/>
+              <a:t>Машинно обучение</a:t>
+            </a:r>
+          </a:p>
+        </p:txBody>
+      </p:sp>
+      <p:sp>
+        <p:nvSpPr>
+          <p:cNvPr id="5" name="Rectangle 4"/>
+          <p:cNvSpPr/>
+          <p:nvPr/>
+        </p:nvSpPr>
+        <p:spPr>
+          <a:xfrm>
+            <a:off x="7131136" y="2181004"/>
+            <a:ext cx="6096000" cy="2062103"/>
+          </a:xfrm>
+          <a:prstGeom prst="rect">
+            <a:avLst/>
+          </a:prstGeom>
+        </p:spPr>
+        <p:txBody>
+          <a:bodyPr>
+            <a:spAutoFit/>
+          </a:bodyPr>
+          <a:lstStyle/>
+          <a:p>
+            <a:r>
+              <a:rPr lang="en-US" sz="3200" b="1" dirty="0"/>
+              <a:t>Frontend</a:t>
+            </a:r>
+          </a:p>
+          <a:p>
+            <a:pPr>
+              <a:buFont typeface="Arial" panose="020B0604020202020204" pitchFamily="34" charset="0"/>
+              <a:buChar char="•"/>
+            </a:pPr>
+            <a:r>
+              <a:rPr lang="en-US" sz="3200" dirty="0"/>
+              <a:t>HTML</a:t>
+            </a:r>
+          </a:p>
+          <a:p>
+            <a:pPr>
+              <a:buFont typeface="Arial" panose="020B0604020202020204" pitchFamily="34" charset="0"/>
+              <a:buChar char="•"/>
+            </a:pPr>
+            <a:r>
+              <a:rPr lang="en-US" sz="3200" dirty="0"/>
+              <a:t>CSS</a:t>
+            </a:r>
+          </a:p>
+          <a:p>
+            <a:pPr>
+              <a:buFont typeface="Arial" panose="020B0604020202020204" pitchFamily="34" charset="0"/>
+              <a:buChar char="•"/>
+            </a:pPr>
+            <a:r>
+              <a:rPr lang="en-US" sz="3200" dirty="0"/>
+              <a:t>JavaScript</a:t>
+            </a:r>
+          </a:p>
+        </p:txBody>
+      </p:sp>
+      <p:pic>
+        <p:nvPicPr>
+          <p:cNvPr id="1032" name="Picture 8" descr="File:JavaScript-logo.png - Wikimedia Commons"/>
+          <p:cNvPicPr>
+            <a:picLocks noChangeAspect="1" noChangeArrowheads="1"/>
+          </p:cNvPicPr>
+          <p:nvPr/>
+        </p:nvPicPr>
+        <p:blipFill>
+          <a:blip r:embed="rId4" cstate="print">
+            <a:extLst>
+              <a:ext uri="{28A0092B-C50C-407E-A947-70E740481C1C}">
+                <a14:useLocalDpi xmlns:a14="http://schemas.microsoft.com/office/drawing/2010/main" val="0"/>
+              </a:ext>
+            </a:extLst>
+          </a:blip>
+          <a:srcRect/>
+          <a:stretch>
+            <a:fillRect/>
+          </a:stretch>
+        </p:blipFill>
+        <p:spPr bwMode="auto">
+          <a:xfrm>
+            <a:off x="10250157" y="4486295"/>
+            <a:ext cx="1601892" cy="1601892"/>
+          </a:xfrm>
+          <a:prstGeom prst="rect">
+            <a:avLst/>
+          </a:prstGeom>
+          <a:noFill/>
+          <a:extLst>
+            <a:ext uri="{909E8E84-426E-40DD-AFC4-6F175D3DCCD1}">
+              <a14:hiddenFill xmlns:a14="http://schemas.microsoft.com/office/drawing/2010/main">
+                <a:solidFill>
+                  <a:srgbClr val="FFFFFF"/>
+                </a:solidFill>
+              </a14:hiddenFill>
+            </a:ext>
+          </a:extLst>
+        </p:spPr>
+      </p:pic>
+    </p:spTree>
+    <p:extLst>
+      <p:ext uri="{BB962C8B-B14F-4D97-AF65-F5344CB8AC3E}">
+        <p14:creationId xmlns:p14="http://schemas.microsoft.com/office/powerpoint/2010/main" val="141585535"/>
+      </p:ext>
+    </p:extLst>
+  </p:cSld>
+  <p:clrMapOvr>
+    <a:masterClrMapping/>
+  </p:clrMapOvr>
+  <p:timing>
+    <p:tnLst>
+      <p:par>
+        <p:cTn id="1" dur="indefinite" restart="never" nodeType="tmRoot"/>
+      </p:par>
+    </p:tnLst>
+  </p:timing>
+</p:sld>
+</file>
+
+<file path=ppt/slides/slide8.xml><?xml version="1.0" encoding="utf-8"?>
+<p:sld xmlns:a="http://schemas.openxmlformats.org/drawingml/2006/main" xmlns:r="http://schemas.openxmlformats.org/officeDocument/2006/relationships" xmlns:p="http://schemas.openxmlformats.org/presentationml/2006/main">
+  <p:cSld>
+    <p:spTree>
+      <p:nvGrpSpPr>
+        <p:cNvPr id="1" name=""/>
+        <p:cNvGrpSpPr/>
+        <p:nvPr/>
+      </p:nvGrpSpPr>
+      <p:grpSpPr>
+        <a:xfrm>
+          <a:off x="0" y="0"/>
+          <a:ext cx="0" cy="0"/>
+          <a:chOff x="0" y="0"/>
+          <a:chExt cx="0" cy="0"/>
+        </a:xfrm>
+      </p:grpSpPr>
+      <p:sp>
+        <p:nvSpPr>
+          <p:cNvPr id="2" name="Title 1"/>
+          <p:cNvSpPr>
+            <a:spLocks noGrp="1"/>
+          </p:cNvSpPr>
+          <p:nvPr>
+            <p:ph type="title"/>
+          </p:nvPr>
+        </p:nvSpPr>
+        <p:spPr/>
+        <p:txBody>
+          <a:bodyPr/>
+          <a:lstStyle/>
+          <a:p>
+            <a:r>
+              <a:rPr lang="bg-BG" dirty="0" smtClean="0"/>
+              <a:t>Резултати</a:t>
+            </a:r>
+            <a:endParaRPr lang="bg-BG" dirty="0"/>
+          </a:p>
+        </p:txBody>
+      </p:sp>
+      <p:pic>
+        <p:nvPicPr>
+          <p:cNvPr id="4" name="Content Placeholder 3"/>
+          <p:cNvPicPr>
+            <a:picLocks noGrp="1" noChangeAspect="1"/>
+          </p:cNvPicPr>
+          <p:nvPr>
+            <p:ph idx="1"/>
+          </p:nvPr>
+        </p:nvPicPr>
+        <p:blipFill>
+          <a:blip r:embed="rId3"/>
+          <a:stretch>
+            <a:fillRect/>
+          </a:stretch>
+        </p:blipFill>
+        <p:spPr>
+          <a:xfrm>
+            <a:off x="1172471" y="2166702"/>
+            <a:ext cx="9907383" cy="3381847"/>
+          </a:xfrm>
+          <a:prstGeom prst="rect">
+            <a:avLst/>
+          </a:prstGeom>
+        </p:spPr>
+      </p:pic>
+    </p:spTree>
+    <p:extLst>
+      <p:ext uri="{BB962C8B-B14F-4D97-AF65-F5344CB8AC3E}">
+        <p14:creationId xmlns:p14="http://schemas.microsoft.com/office/powerpoint/2010/main" val="2310466589"/>
+      </p:ext>
+    </p:extLst>
+  </p:cSld>
+  <p:clrMapOvr>
+    <a:masterClrMapping/>
+  </p:clrMapOvr>
+  <p:timing>
+    <p:tnLst>
+      <p:par>
+        <p:cTn id="1" dur="indefinite" restart="never" nodeType="tmRoot"/>
+      </p:par>
+    </p:tnLst>
+  </p:timing>
+</p:sld>
+</file>
+
+<file path=ppt/slides/slide9.xml><?xml version="1.0" encoding="utf-8"?>
+<p:sld xmlns:a="http://schemas.openxmlformats.org/drawingml/2006/main" xmlns:r="http://schemas.openxmlformats.org/officeDocument/2006/relationships" xmlns:p="http://schemas.openxmlformats.org/presentationml/2006/main">
+  <p:cSld>
+    <p:spTree>
+      <p:nvGrpSpPr>
+        <p:cNvPr id="1" name=""/>
+        <p:cNvGrpSpPr/>
+        <p:nvPr/>
+      </p:nvGrpSpPr>
+      <p:grpSpPr>
+        <a:xfrm>
+          <a:off x="0" y="0"/>
+          <a:ext cx="0" cy="0"/>
+          <a:chOff x="0" y="0"/>
+          <a:chExt cx="0" cy="0"/>
+        </a:xfrm>
+      </p:grpSpPr>
+      <p:sp>
+        <p:nvSpPr>
+          <p:cNvPr id="2" name="Title 1"/>
+          <p:cNvSpPr>
+            <a:spLocks noGrp="1"/>
+          </p:cNvSpPr>
+          <p:nvPr>
+            <p:ph type="title"/>
+          </p:nvPr>
+        </p:nvSpPr>
+        <p:spPr/>
+        <p:txBody>
+          <a:bodyPr/>
+          <a:lstStyle/>
+          <a:p>
+            <a:r>
+              <a:rPr lang="bg-BG" dirty="0" smtClean="0"/>
+              <a:t>Приложение в реалния свят</a:t>
+            </a:r>
+            <a:endParaRPr lang="bg-BG" dirty="0"/>
+          </a:p>
+        </p:txBody>
+      </p:sp>
+      <p:sp>
+        <p:nvSpPr>
+          <p:cNvPr id="4" name="Rectangle 3"/>
+          <p:cNvSpPr/>
+          <p:nvPr/>
+        </p:nvSpPr>
+        <p:spPr>
+          <a:xfrm>
+            <a:off x="5509482" y="2344105"/>
+            <a:ext cx="6031489" cy="2554545"/>
+          </a:xfrm>
+          <a:prstGeom prst="rect">
+            <a:avLst/>
+          </a:prstGeom>
+        </p:spPr>
+        <p:txBody>
+          <a:bodyPr wrap="square">
+            <a:spAutoFit/>
+          </a:bodyPr>
+          <a:lstStyle/>
+          <a:p>
+            <a:r>
+              <a:rPr lang="ru-RU" sz="2000" dirty="0"/>
+              <a:t>Анализът на емоции е инструмент с широко приложение в различни сфери</a:t>
+            </a:r>
+            <a:r>
+              <a:rPr lang="ru-RU" sz="2000" dirty="0" smtClean="0"/>
+              <a:t>:</a:t>
+            </a:r>
+          </a:p>
+          <a:p>
+            <a:endParaRPr lang="ru-RU" sz="2000" dirty="0"/>
+          </a:p>
+          <a:p>
+            <a:endParaRPr lang="ru-RU" sz="2000" dirty="0"/>
+          </a:p>
+          <a:p>
+            <a:pPr>
+              <a:buFont typeface="Arial" panose="020B0604020202020204" pitchFamily="34" charset="0"/>
+              <a:buChar char="•"/>
+            </a:pPr>
+            <a:r>
+              <a:rPr lang="ru-RU" sz="2000" dirty="0"/>
+              <a:t>Онлайн магазини и платформи за електронна </a:t>
+            </a:r>
+            <a:r>
+              <a:rPr lang="ru-RU" sz="2000" dirty="0" smtClean="0"/>
+              <a:t>търговия</a:t>
+            </a:r>
+            <a:endParaRPr lang="ru-RU" sz="2000" dirty="0"/>
+          </a:p>
+          <a:p>
+            <a:pPr>
+              <a:buFont typeface="Arial" panose="020B0604020202020204" pitchFamily="34" charset="0"/>
+              <a:buChar char="•"/>
+            </a:pPr>
+            <a:r>
+              <a:rPr lang="ru-RU" sz="2000" dirty="0"/>
+              <a:t>Социални мрежи и медиен мониторинг</a:t>
+            </a:r>
+          </a:p>
+          <a:p>
+            <a:pPr>
+              <a:buFont typeface="Arial" panose="020B0604020202020204" pitchFamily="34" charset="0"/>
+              <a:buChar char="•"/>
+            </a:pPr>
+            <a:r>
+              <a:rPr lang="ru-RU" sz="2000" dirty="0"/>
+              <a:t>Обратна връзка от клиенти и проучвания на пазара</a:t>
+            </a:r>
+          </a:p>
+        </p:txBody>
+      </p:sp>
+      <p:pic>
+        <p:nvPicPr>
+          <p:cNvPr id="2050" name="Picture 2" descr="How to Start an Online Store — Simple, Step-by-Step Guide"/>
+          <p:cNvPicPr>
+            <a:picLocks noChangeAspect="1" noChangeArrowheads="1"/>
+          </p:cNvPicPr>
+          <p:nvPr/>
+        </p:nvPicPr>
+        <p:blipFill>
+          <a:blip r:embed="rId3" cstate="print">
+            <a:extLst>
+              <a:ext uri="{28A0092B-C50C-407E-A947-70E740481C1C}">
+                <a14:useLocalDpi xmlns:a14="http://schemas.microsoft.com/office/drawing/2010/main" val="0"/>
+              </a:ext>
+            </a:extLst>
+          </a:blip>
+          <a:srcRect/>
+          <a:stretch>
+            <a:fillRect/>
+          </a:stretch>
+        </p:blipFill>
+        <p:spPr bwMode="auto">
+          <a:xfrm>
+            <a:off x="1097280" y="2499106"/>
+            <a:ext cx="3990297" cy="2244542"/>
+          </a:xfrm>
+          <a:prstGeom prst="rect">
+            <a:avLst/>
+          </a:prstGeom>
+          <a:noFill/>
+          <a:extLst>
+            <a:ext uri="{909E8E84-426E-40DD-AFC4-6F175D3DCCD1}">
+              <a14:hiddenFill xmlns:a14="http://schemas.microsoft.com/office/drawing/2010/main">
+                <a:solidFill>
+                  <a:srgbClr val="FFFFFF"/>
+                </a:solidFill>
+              </a14:hiddenFill>
+            </a:ext>
+          </a:extLst>
+        </p:spPr>
+      </p:pic>
+    </p:spTree>
+    <p:extLst>
+      <p:ext uri="{BB962C8B-B14F-4D97-AF65-F5344CB8AC3E}">
+        <p14:creationId xmlns:p14="http://schemas.microsoft.com/office/powerpoint/2010/main" val="4222481814"/>
       </p:ext>
     </p:extLst>
   </p:cSld>

--- a/DR/защита.pptx
+++ b/DR/защита.pptx
@@ -538,7 +538,15 @@
           <a:p>
             <a:r>
               <a:rPr lang="ru-RU" dirty="0" smtClean="0"/>
-              <a:t>Казвам се Александър Кулин и ще ви представя моя дипломен проект на тема:</a:t>
+              <a:t>Казвам се Александър Кулин и ще ви представя </a:t>
+            </a:r>
+            <a:r>
+              <a:rPr lang="ru-RU" dirty="0" smtClean="0"/>
+              <a:t>своя </a:t>
+            </a:r>
+            <a:r>
+              <a:rPr lang="ru-RU" dirty="0" smtClean="0"/>
+              <a:t>дипломен проект на тема:</a:t>
             </a:r>
           </a:p>
           <a:p>
@@ -1188,8 +1196,65 @@
                 <a:ea typeface="+mn-ea"/>
                 <a:cs typeface="+mn-cs"/>
               </a:rPr>
-              <a:t>Накрая се прилага класификация, при която системата определя към коя категория принадлежи текстът.</a:t>
-            </a:r>
+              <a:t>Накрая се прилага класификация, при която системата определя към коя категория принадлежи </a:t>
+            </a:r>
+            <a:r>
+              <a:rPr lang="bg-BG" sz="1200" kern="1200" dirty="0" smtClean="0">
+                <a:solidFill>
+                  <a:schemeClr val="tx1"/>
+                </a:solidFill>
+                <a:effectLst/>
+                <a:latin typeface="+mn-lt"/>
+                <a:ea typeface="+mn-ea"/>
+                <a:cs typeface="+mn-cs"/>
+              </a:rPr>
+              <a:t>текстът,</a:t>
+            </a:r>
+            <a:r>
+              <a:rPr lang="bg-BG" sz="1200" kern="1200" baseline="0" dirty="0" smtClean="0">
+                <a:solidFill>
+                  <a:schemeClr val="tx1"/>
+                </a:solidFill>
+                <a:effectLst/>
+                <a:latin typeface="+mn-lt"/>
+                <a:ea typeface="+mn-ea"/>
+                <a:cs typeface="+mn-cs"/>
+              </a:rPr>
+              <a:t> и</a:t>
+            </a:r>
+            <a:r>
+              <a:rPr lang="bg-BG" sz="1200" kern="1200" dirty="0" smtClean="0">
+                <a:solidFill>
+                  <a:schemeClr val="tx1"/>
+                </a:solidFill>
+                <a:effectLst/>
+                <a:latin typeface="+mn-lt"/>
+                <a:ea typeface="+mn-ea"/>
+                <a:cs typeface="+mn-cs"/>
+              </a:rPr>
+              <a:t>ли с други думи,</a:t>
+            </a:r>
+            <a:r>
+              <a:rPr lang="bg-BG" sz="1200" kern="1200" baseline="0" dirty="0" smtClean="0">
+                <a:solidFill>
+                  <a:schemeClr val="tx1"/>
+                </a:solidFill>
+                <a:effectLst/>
+                <a:latin typeface="+mn-lt"/>
+                <a:ea typeface="+mn-ea"/>
+                <a:cs typeface="+mn-cs"/>
+              </a:rPr>
+              <a:t> каква емоция изразява.</a:t>
+            </a:r>
+            <a:endParaRPr lang="bg-BG" sz="1200" kern="1200" dirty="0" smtClean="0">
+              <a:solidFill>
+                <a:schemeClr val="tx1"/>
+              </a:solidFill>
+              <a:effectLst/>
+              <a:latin typeface="+mn-lt"/>
+              <a:ea typeface="+mn-ea"/>
+              <a:cs typeface="+mn-cs"/>
+            </a:endParaRPr>
           </a:p>
         </p:txBody>
       </p:sp>
@@ -5447,7 +5512,15 @@
             <a:pPr algn="ctr"/>
             <a:r>
               <a:rPr lang="ru-RU" sz="3600" dirty="0"/>
-              <a:t>Държавен изпит за придобиване на трета степен на професионална квалификация – част по теория на професиятапо професия код 481030 „Приложен програмист”специалност код 4810301 „Приложно програмиране"</a:t>
+              <a:t>Държавен изпит за придобиване на трета степен на професионална квалификация – част по теория на </a:t>
+            </a:r>
+            <a:r>
+              <a:rPr lang="ru-RU" sz="3600" dirty="0" smtClean="0"/>
+              <a:t>професията по </a:t>
+            </a:r>
+            <a:r>
+              <a:rPr lang="ru-RU" sz="3600" dirty="0"/>
+              <a:t>професия код 481030 „Приложен програмист”специалност код 4810301 „Приложно програмиране"</a:t>
             </a:r>
             <a:endParaRPr lang="bg-BG" sz="3600" dirty="0"/>
           </a:p>
@@ -5660,6 +5733,9 @@
   <p:clrMapOvr>
     <a:masterClrMapping/>
   </p:clrMapOvr>
+  <p:transition spd="slow">
+    <p:push dir="u"/>
+  </p:transition>
   <p:timing>
     <p:tnLst>
       <p:par>
@@ -5853,6 +5929,9 @@
   <p:clrMapOvr>
     <a:masterClrMapping/>
   </p:clrMapOvr>
+  <p:transition spd="slow">
+    <p:push dir="u"/>
+  </p:transition>
   <p:timing>
     <p:tnLst>
       <p:par>
@@ -5939,6 +6018,9 @@
   <p:clrMapOvr>
     <a:masterClrMapping/>
   </p:clrMapOvr>
+  <p:transition spd="slow">
+    <p:push dir="u"/>
+  </p:transition>
   <p:timing>
     <p:tnLst>
       <p:par>
@@ -6036,8 +6118,15 @@
           <a:p>
             <a:r>
               <a:rPr lang="ru-RU" b="1" dirty="0" smtClean="0"/>
-              <a:t>Уеб приложение за анализ</a:t>
-            </a:r>
+              <a:t>Уеб приложение за </a:t>
+            </a:r>
+            <a:r>
+              <a:rPr lang="ru-RU" b="1" dirty="0" smtClean="0"/>
+              <a:t>анализ:</a:t>
+            </a:r>
+          </a:p>
+          <a:p>
+            <a:endParaRPr lang="ru-RU" b="1" dirty="0" smtClean="0"/>
           </a:p>
           <a:p>
             <a:pPr>
@@ -6077,17 +6166,6 @@
             <a:endParaRPr lang="ru-RU" dirty="0"/>
           </a:p>
           <a:p>
-            <a:pPr>
-              <a:buFont typeface="Arial" panose="020B0604020202020204" pitchFamily="34" charset="0"/>
-              <a:buChar char="•"/>
-            </a:pPr>
-            <a:endParaRPr lang="ru-RU" dirty="0" smtClean="0"/>
-          </a:p>
-          <a:p>
-            <a:pPr>
-              <a:buFont typeface="Arial" panose="020B0604020202020204" pitchFamily="34" charset="0"/>
-              <a:buChar char="•"/>
-            </a:pPr>
             <a:endParaRPr lang="ru-RU" dirty="0"/>
           </a:p>
           <a:p>
@@ -6137,6 +6215,9 @@
   <p:clrMapOvr>
     <a:masterClrMapping/>
   </p:clrMapOvr>
+  <p:transition spd="slow">
+    <p:push dir="u"/>
+  </p:transition>
   <p:timing>
     <p:tnLst>
       <p:par>
@@ -6223,6 +6304,9 @@
   <p:clrMapOvr>
     <a:masterClrMapping/>
   </p:clrMapOvr>
+  <p:transition spd="slow">
+    <p:push dir="u"/>
+  </p:transition>
   <p:timing>
     <p:tnLst>
       <p:par>
@@ -6418,6 +6502,9 @@
   <p:clrMapOvr>
     <a:masterClrMapping/>
   </p:clrMapOvr>
+  <p:transition spd="slow">
+    <p:push dir="u"/>
+  </p:transition>
   <p:timing>
     <p:tnLst>
       <p:par>
@@ -6676,6 +6763,9 @@
   <p:clrMapOvr>
     <a:masterClrMapping/>
   </p:clrMapOvr>
+  <p:transition spd="slow">
+    <p:push dir="u"/>
+  </p:transition>
   <p:timing>
     <p:tnLst>
       <p:par>
@@ -6762,6 +6852,9 @@
   <p:clrMapOvr>
     <a:masterClrMapping/>
   </p:clrMapOvr>
+  <p:transition spd="slow">
+    <p:push dir="u"/>
+  </p:transition>
   <p:timing>
     <p:tnLst>
       <p:par>
@@ -6936,6 +7029,9 @@
   <p:clrMapOvr>
     <a:masterClrMapping/>
   </p:clrMapOvr>
+  <p:transition spd="slow">
+    <p:push dir="u"/>
+  </p:transition>
   <p:timing>
     <p:tnLst>
       <p:par>

--- a/DR/защита.pptx
+++ b/DR/защита.pptx
@@ -6008,6 +6008,102 @@
           </a:prstGeom>
         </p:spPr>
       </p:pic>
+      <p:sp>
+        <p:nvSpPr>
+          <p:cNvPr id="3" name="Rectangle 2"/>
+          <p:cNvSpPr/>
+          <p:nvPr/>
+        </p:nvSpPr>
+        <p:spPr>
+          <a:xfrm>
+            <a:off x="8939813" y="3293616"/>
+            <a:ext cx="97655" cy="177553"/>
+          </a:xfrm>
+          <a:prstGeom prst="rect">
+            <a:avLst/>
+          </a:prstGeom>
+          <a:solidFill>
+            <a:srgbClr val="F1ECE4"/>
+          </a:solidFill>
+          <a:ln>
+            <a:solidFill>
+              <a:srgbClr val="F1ECE4"/>
+            </a:solidFill>
+          </a:ln>
+        </p:spPr>
+        <p:style>
+          <a:lnRef idx="2">
+            <a:schemeClr val="accent1">
+              <a:shade val="50000"/>
+            </a:schemeClr>
+          </a:lnRef>
+          <a:fillRef idx="1">
+            <a:schemeClr val="accent1"/>
+          </a:fillRef>
+          <a:effectRef idx="0">
+            <a:schemeClr val="accent1"/>
+          </a:effectRef>
+          <a:fontRef idx="minor">
+            <a:schemeClr val="lt1"/>
+          </a:fontRef>
+        </p:style>
+        <p:txBody>
+          <a:bodyPr rtlCol="0" anchor="ctr"/>
+          <a:lstStyle/>
+          <a:p>
+            <a:pPr algn="ctr"/>
+            <a:endParaRPr lang="bg-BG"/>
+          </a:p>
+        </p:txBody>
+      </p:sp>
+      <p:sp>
+        <p:nvSpPr>
+          <p:cNvPr id="5" name="Rectangle 4"/>
+          <p:cNvSpPr/>
+          <p:nvPr/>
+        </p:nvSpPr>
+        <p:spPr>
+          <a:xfrm>
+            <a:off x="8916953" y="3408305"/>
+            <a:ext cx="45719" cy="45719"/>
+          </a:xfrm>
+          <a:prstGeom prst="rect">
+            <a:avLst/>
+          </a:prstGeom>
+          <a:solidFill>
+            <a:srgbClr val="F1ECE4"/>
+          </a:solidFill>
+          <a:ln>
+            <a:solidFill>
+              <a:srgbClr val="F1ECE4"/>
+            </a:solidFill>
+          </a:ln>
+        </p:spPr>
+        <p:style>
+          <a:lnRef idx="2">
+            <a:schemeClr val="accent1">
+              <a:shade val="50000"/>
+            </a:schemeClr>
+          </a:lnRef>
+          <a:fillRef idx="1">
+            <a:schemeClr val="accent1"/>
+          </a:fillRef>
+          <a:effectRef idx="0">
+            <a:schemeClr val="accent1"/>
+          </a:effectRef>
+          <a:fontRef idx="minor">
+            <a:schemeClr val="lt1"/>
+          </a:fontRef>
+        </p:style>
+        <p:txBody>
+          <a:bodyPr rtlCol="0" anchor="ctr"/>
+          <a:lstStyle/>
+          <a:p>
+            <a:pPr algn="ctr"/>
+            <a:endParaRPr lang="bg-BG"/>
+          </a:p>
+        </p:txBody>
+      </p:sp>
     </p:spTree>
     <p:extLst>
       <p:ext uri="{BB962C8B-B14F-4D97-AF65-F5344CB8AC3E}">

--- a/DR/защита.pptx
+++ b/DR/защита.pptx
@@ -206,7 +206,7 @@
           <a:p>
             <a:fld id="{07954605-55D4-4E23-90C8-AD482CC8543E}" type="datetimeFigureOut">
               <a:rPr lang="bg-BG" smtClean="0"/>
-              <a:t>29.4.2026 г.</a:t>
+              <a:t>12.5.2026 г.</a:t>
             </a:fld>
             <a:endParaRPr lang="bg-BG"/>
           </a:p>
@@ -538,15 +538,7 @@
           <a:p>
             <a:r>
               <a:rPr lang="ru-RU" dirty="0" smtClean="0"/>
-              <a:t>Казвам се Александър Кулин и ще ви представя </a:t>
-            </a:r>
-            <a:r>
-              <a:rPr lang="ru-RU" dirty="0" smtClean="0"/>
-              <a:t>своя </a:t>
-            </a:r>
-            <a:r>
-              <a:rPr lang="ru-RU" dirty="0" smtClean="0"/>
-              <a:t>дипломен проект на тема:</a:t>
+              <a:t>Казвам се Александър Кулин и ще ви представя своя дипломен проект на тема:</a:t>
             </a:r>
           </a:p>
           <a:p>
@@ -1074,8 +1066,21 @@
                 <a:ea typeface="+mn-ea"/>
                 <a:cs typeface="+mn-cs"/>
               </a:rPr>
-              <a:t>Работата на приложението започва от потребителя, който въвежда текст. Този текст се изпраща към сървъра, където преминава през няколко етапа</a:t>
-            </a:r>
+              <a:t>Работата на приложението започва от потребителя, който въвежда текст. Този текст се изпраща към сървъра, където преминава през няколко етапа.</a:t>
+            </a:r>
+          </a:p>
+          <a:p>
+            <a:endParaRPr lang="bg-BG" sz="1200" kern="1200" dirty="0" smtClean="0">
+              <a:solidFill>
+                <a:schemeClr val="tx1"/>
+              </a:solidFill>
+              <a:effectLst/>
+              <a:latin typeface="+mn-lt"/>
+              <a:ea typeface="+mn-ea"/>
+              <a:cs typeface="+mn-cs"/>
+            </a:endParaRPr>
+          </a:p>
+          <a:p>
             <a:r>
               <a:rPr lang="bg-BG" sz="1200" kern="1200" dirty="0" smtClean="0">
                 <a:solidFill>
@@ -1086,44 +1091,7 @@
                 <a:ea typeface="+mn-ea"/>
                 <a:cs typeface="+mn-cs"/>
               </a:rPr>
-              <a:t>.</a:t>
-            </a:r>
-          </a:p>
-          <a:p>
-            <a:endParaRPr lang="bg-BG" sz="1200" kern="1200" dirty="0" smtClean="0">
-              <a:solidFill>
-                <a:schemeClr val="tx1"/>
-              </a:solidFill>
-              <a:effectLst/>
-              <a:latin typeface="+mn-lt"/>
-              <a:ea typeface="+mn-ea"/>
-              <a:cs typeface="+mn-cs"/>
-            </a:endParaRPr>
-          </a:p>
-          <a:p>
-            <a:r>
-              <a:rPr lang="bg-BG" sz="1200" kern="1200" dirty="0" smtClean="0">
-                <a:solidFill>
-                  <a:schemeClr val="tx1"/>
-                </a:solidFill>
-                <a:effectLst/>
-                <a:latin typeface="+mn-lt"/>
-                <a:ea typeface="+mn-ea"/>
-                <a:cs typeface="+mn-cs"/>
-              </a:rPr>
-              <a:t>Първо се извършва предварителна обработка – текстът се почиства и подготвя. След това </a:t>
-            </a:r>
-            <a:r>
-              <a:rPr lang="bg-BG" sz="1200" kern="1200" dirty="0" smtClean="0">
-                <a:solidFill>
-                  <a:schemeClr val="tx1"/>
-                </a:solidFill>
-                <a:effectLst/>
-                <a:latin typeface="+mn-lt"/>
-                <a:ea typeface="+mn-ea"/>
-                <a:cs typeface="+mn-cs"/>
-              </a:rPr>
-              <a:t>преминава през токенизация,</a:t>
+              <a:t>Първо се извършва предварителна обработка – текстът се почиства и подготвя. След това преминава през токенизация,</a:t>
             </a:r>
             <a:r>
               <a:rPr lang="bg-BG" sz="1200" kern="1200" baseline="0" dirty="0" smtClean="0">
@@ -1147,8 +1115,21 @@
                 <a:ea typeface="+mn-ea"/>
                 <a:cs typeface="+mn-cs"/>
               </a:rPr>
-              <a:t> разделяне на текста </a:t>
-            </a:r>
+              <a:t> разделяне на текста на отделни елементи.</a:t>
+            </a:r>
+          </a:p>
+          <a:p>
+            <a:endParaRPr lang="bg-BG" sz="1200" kern="1200" dirty="0" smtClean="0">
+              <a:solidFill>
+                <a:schemeClr val="tx1"/>
+              </a:solidFill>
+              <a:effectLst/>
+              <a:latin typeface="+mn-lt"/>
+              <a:ea typeface="+mn-ea"/>
+              <a:cs typeface="+mn-cs"/>
+            </a:endParaRPr>
+          </a:p>
+          <a:p>
             <a:r>
               <a:rPr lang="bg-BG" sz="1200" kern="1200" dirty="0" smtClean="0">
                 <a:solidFill>
@@ -1159,56 +1140,7 @@
                 <a:ea typeface="+mn-ea"/>
                 <a:cs typeface="+mn-cs"/>
               </a:rPr>
-              <a:t>на отделни </a:t>
-            </a:r>
-            <a:r>
-              <a:rPr lang="bg-BG" sz="1200" kern="1200" dirty="0" smtClean="0">
-                <a:solidFill>
-                  <a:schemeClr val="tx1"/>
-                </a:solidFill>
-                <a:effectLst/>
-                <a:latin typeface="+mn-lt"/>
-                <a:ea typeface="+mn-ea"/>
-                <a:cs typeface="+mn-cs"/>
-              </a:rPr>
-              <a:t>елементи.</a:t>
-            </a:r>
-          </a:p>
-          <a:p>
-            <a:endParaRPr lang="bg-BG" sz="1200" kern="1200" dirty="0" smtClean="0">
-              <a:solidFill>
-                <a:schemeClr val="tx1"/>
-              </a:solidFill>
-              <a:effectLst/>
-              <a:latin typeface="+mn-lt"/>
-              <a:ea typeface="+mn-ea"/>
-              <a:cs typeface="+mn-cs"/>
-            </a:endParaRPr>
-          </a:p>
-          <a:p>
-            <a:r>
-              <a:rPr lang="bg-BG" sz="1200" kern="1200" dirty="0" smtClean="0">
-                <a:solidFill>
-                  <a:schemeClr val="tx1"/>
-                </a:solidFill>
-                <a:effectLst/>
-                <a:latin typeface="+mn-lt"/>
-                <a:ea typeface="+mn-ea"/>
-                <a:cs typeface="+mn-cs"/>
-              </a:rPr>
-              <a:t>Накрая се прилага класификация, при която системата определя към коя категория принадлежи </a:t>
-            </a:r>
-            <a:r>
-              <a:rPr lang="bg-BG" sz="1200" kern="1200" dirty="0" smtClean="0">
-                <a:solidFill>
-                  <a:schemeClr val="tx1"/>
-                </a:solidFill>
-                <a:effectLst/>
-                <a:latin typeface="+mn-lt"/>
-                <a:ea typeface="+mn-ea"/>
-                <a:cs typeface="+mn-cs"/>
-              </a:rPr>
-              <a:t>текстът,</a:t>
+              <a:t>Накрая се прилага класификация, при която системата определя към коя категория принадлежи текстът,</a:t>
             </a:r>
             <a:r>
               <a:rPr lang="bg-BG" sz="1200" kern="1200" baseline="0" dirty="0" smtClean="0">
@@ -2016,7 +1948,7 @@
           <a:p>
             <a:fld id="{6D2D7101-39F5-43AF-A214-156FBC31505C}" type="datetimeFigureOut">
               <a:rPr lang="bg-BG" smtClean="0"/>
-              <a:t>29.4.2026 г.</a:t>
+              <a:t>12.5.2026 г.</a:t>
             </a:fld>
             <a:endParaRPr lang="bg-BG"/>
           </a:p>
@@ -2224,7 +2156,7 @@
           <a:p>
             <a:fld id="{6D2D7101-39F5-43AF-A214-156FBC31505C}" type="datetimeFigureOut">
               <a:rPr lang="bg-BG" smtClean="0"/>
-              <a:t>29.4.2026 г.</a:t>
+              <a:t>12.5.2026 г.</a:t>
             </a:fld>
             <a:endParaRPr lang="bg-BG"/>
           </a:p>
@@ -2480,7 +2412,7 @@
           <a:p>
             <a:fld id="{6D2D7101-39F5-43AF-A214-156FBC31505C}" type="datetimeFigureOut">
               <a:rPr lang="bg-BG" smtClean="0"/>
-              <a:t>29.4.2026 г.</a:t>
+              <a:t>12.5.2026 г.</a:t>
             </a:fld>
             <a:endParaRPr lang="bg-BG"/>
           </a:p>
@@ -2654,7 +2586,7 @@
           <a:p>
             <a:fld id="{6D2D7101-39F5-43AF-A214-156FBC31505C}" type="datetimeFigureOut">
               <a:rPr lang="bg-BG" smtClean="0"/>
-              <a:t>29.4.2026 г.</a:t>
+              <a:t>12.5.2026 г.</a:t>
             </a:fld>
             <a:endParaRPr lang="bg-BG"/>
           </a:p>
@@ -2997,7 +2929,7 @@
           <a:p>
             <a:fld id="{6D2D7101-39F5-43AF-A214-156FBC31505C}" type="datetimeFigureOut">
               <a:rPr lang="bg-BG" smtClean="0"/>
-              <a:t>29.4.2026 г.</a:t>
+              <a:t>12.5.2026 г.</a:t>
             </a:fld>
             <a:endParaRPr lang="bg-BG"/>
           </a:p>
@@ -3272,7 +3204,7 @@
           <a:p>
             <a:fld id="{6D2D7101-39F5-43AF-A214-156FBC31505C}" type="datetimeFigureOut">
               <a:rPr lang="bg-BG" smtClean="0"/>
-              <a:t>29.4.2026 г.</a:t>
+              <a:t>12.5.2026 г.</a:t>
             </a:fld>
             <a:endParaRPr lang="bg-BG"/>
           </a:p>
@@ -3651,7 +3583,7 @@
           <a:p>
             <a:fld id="{6D2D7101-39F5-43AF-A214-156FBC31505C}" type="datetimeFigureOut">
               <a:rPr lang="bg-BG" smtClean="0"/>
-              <a:t>29.4.2026 г.</a:t>
+              <a:t>12.5.2026 г.</a:t>
             </a:fld>
             <a:endParaRPr lang="bg-BG"/>
           </a:p>
@@ -3769,7 +3701,7 @@
           <a:p>
             <a:fld id="{6D2D7101-39F5-43AF-A214-156FBC31505C}" type="datetimeFigureOut">
               <a:rPr lang="bg-BG" smtClean="0"/>
-              <a:t>29.4.2026 г.</a:t>
+              <a:t>12.5.2026 г.</a:t>
             </a:fld>
             <a:endParaRPr lang="bg-BG"/>
           </a:p>
@@ -3940,7 +3872,7 @@
           <a:p>
             <a:fld id="{6D2D7101-39F5-43AF-A214-156FBC31505C}" type="datetimeFigureOut">
               <a:rPr lang="bg-BG" smtClean="0"/>
-              <a:t>29.4.2026 г.</a:t>
+              <a:t>12.5.2026 г.</a:t>
             </a:fld>
             <a:endParaRPr lang="bg-BG"/>
           </a:p>
@@ -4294,7 +4226,7 @@
           <a:p>
             <a:fld id="{6D2D7101-39F5-43AF-A214-156FBC31505C}" type="datetimeFigureOut">
               <a:rPr lang="bg-BG" smtClean="0"/>
-              <a:t>29.4.2026 г.</a:t>
+              <a:t>12.5.2026 г.</a:t>
             </a:fld>
             <a:endParaRPr lang="bg-BG"/>
           </a:p>
@@ -4676,7 +4608,7 @@
           <a:p>
             <a:fld id="{6D2D7101-39F5-43AF-A214-156FBC31505C}" type="datetimeFigureOut">
               <a:rPr lang="bg-BG" smtClean="0"/>
-              <a:t>29.4.2026 г.</a:t>
+              <a:t>12.5.2026 г.</a:t>
             </a:fld>
             <a:endParaRPr lang="bg-BG"/>
           </a:p>
@@ -4963,7 +4895,7 @@
           <a:p>
             <a:fld id="{6D2D7101-39F5-43AF-A214-156FBC31505C}" type="datetimeFigureOut">
               <a:rPr lang="bg-BG" smtClean="0"/>
-              <a:t>29.4.2026 г.</a:t>
+              <a:t>12.5.2026 г.</a:t>
             </a:fld>
             <a:endParaRPr lang="bg-BG"/>
           </a:p>
@@ -5544,7 +5476,7 @@
         </p:spPr>
         <p:txBody>
           <a:bodyPr>
-            <a:normAutofit fontScale="77500" lnSpcReduction="20000"/>
+            <a:normAutofit fontScale="85000" lnSpcReduction="20000"/>
           </a:bodyPr>
           <a:lstStyle/>
           <a:p>
@@ -5558,11 +5490,19 @@
             </a:r>
             <a:r>
               <a:rPr lang="ru-RU" dirty="0"/>
-              <a:t>: „Анализ на емоции в текст чрез обработка на естествен език</a:t>
+              <a:t>: „Анализ на емоции в текст </a:t>
             </a:r>
             <a:r>
               <a:rPr lang="ru-RU" dirty="0" smtClean="0"/>
-              <a:t>“</a:t>
+              <a:t>(</a:t>
+            </a:r>
+            <a:r>
+              <a:rPr lang="en-US" dirty="0" smtClean="0"/>
+              <a:t>Sentiment Analysis</a:t>
+            </a:r>
+            <a:r>
+              <a:rPr lang="ru-RU" dirty="0" smtClean="0"/>
+              <a:t>)“</a:t>
             </a:r>
             <a:endParaRPr lang="en-US" dirty="0" smtClean="0"/>
           </a:p>
@@ -6214,11 +6154,7 @@
           <a:p>
             <a:r>
               <a:rPr lang="ru-RU" b="1" dirty="0" smtClean="0"/>
-              <a:t>Уеб приложение за </a:t>
-            </a:r>
-            <a:r>
-              <a:rPr lang="ru-RU" b="1" dirty="0" smtClean="0"/>
-              <a:t>анализ:</a:t>
+              <a:t>Уеб приложение за анализ:</a:t>
             </a:r>
           </a:p>
           <a:p>
